--- a/assets/pptx/catalog-256.pptx
+++ b/assets/pptx/catalog-256.pptx
@@ -3246,7 +3246,7 @@
                 <a:ea typeface="Ebrima"/>
                 <a:cs typeface="Ebrima"/>
               </a:rPr>
-              <a:t>እውነት ሕይወት መንገድ (2x)</a:t>
+              <a:t>እውነት ሕይወት መንገድ 2x</a:t>
             </a:r>
           </a:p>
           <a:p>
@@ -3264,7 +3264,7 @@
                 <a:ea typeface="Ebrima"/>
                 <a:cs typeface="Ebrima"/>
               </a:rPr>
-              <a:t>ኢየሱስ ነው (3x)</a:t>
+              <a:t>ኢየሱስ ነው 3x</a:t>
             </a:r>
           </a:p>
           <a:p>
@@ -3282,7 +3282,7 @@
                 <a:ea typeface="Ebrima"/>
                 <a:cs typeface="Ebrima"/>
               </a:rPr>
-              <a:t>እውነት ሕይወት መንገድ (2x)</a:t>
+              <a:t>እውነት ሕይወት መንገድ 2x</a:t>
             </a:r>
           </a:p>
           <a:p>
@@ -3300,7 +3300,7 @@
                 <a:ea typeface="Ebrima"/>
                 <a:cs typeface="Ebrima"/>
               </a:rPr>
-              <a:t>ኢየሱስ ነው (3x)</a:t>
+              <a:t>ኢየሱስ ነው 3x</a:t>
             </a:r>
           </a:p>
         </p:txBody>
@@ -3560,7 +3560,7 @@
                 <a:ea typeface="Ebrima"/>
                 <a:cs typeface="Ebrima"/>
               </a:rPr>
-              <a:t>እውነት ሕይወት መንገድ (2x)</a:t>
+              <a:t>እውነት ሕይወት መንገድ 2x</a:t>
             </a:r>
           </a:p>
           <a:p>
@@ -3578,7 +3578,7 @@
                 <a:ea typeface="Ebrima"/>
                 <a:cs typeface="Ebrima"/>
               </a:rPr>
-              <a:t>ኢየሱስ ነው (3x)</a:t>
+              <a:t>ኢየሱስ ነው 3x</a:t>
             </a:r>
           </a:p>
           <a:p>
@@ -3596,7 +3596,7 @@
                 <a:ea typeface="Ebrima"/>
                 <a:cs typeface="Ebrima"/>
               </a:rPr>
-              <a:t>እውነት ሕይወት መንገድ (2x)</a:t>
+              <a:t>እውነት ሕይወት መንገድ 2x</a:t>
             </a:r>
           </a:p>
           <a:p>
@@ -3614,7 +3614,7 @@
                 <a:ea typeface="Ebrima"/>
                 <a:cs typeface="Ebrima"/>
               </a:rPr>
-              <a:t>ኢየሱስ ነው (3x)</a:t>
+              <a:t>ኢየሱስ ነው 3x</a:t>
             </a:r>
           </a:p>
         </p:txBody>
@@ -3681,7 +3681,7 @@
                 <a:ea typeface="Ebrima"/>
                 <a:cs typeface="Ebrima"/>
               </a:rPr>
-              <a:t>እውነት ሕይወት መንገድ (2x)</a:t>
+              <a:t>እውነት ሕይወት መንገድ 2x</a:t>
             </a:r>
           </a:p>
           <a:p>
@@ -3699,7 +3699,7 @@
                 <a:ea typeface="Ebrima"/>
                 <a:cs typeface="Ebrima"/>
               </a:rPr>
-              <a:t>ኢየሱስ ነው (3x)</a:t>
+              <a:t>ኢየሱስ ነው 3x</a:t>
             </a:r>
           </a:p>
           <a:p>
@@ -3717,7 +3717,7 @@
                 <a:ea typeface="Ebrima"/>
                 <a:cs typeface="Ebrima"/>
               </a:rPr>
-              <a:t>እውነት ሕይወት መንገድ (2x)</a:t>
+              <a:t>እውነት ሕይወት መንገድ 2x</a:t>
             </a:r>
           </a:p>
           <a:p>
@@ -3735,7 +3735,7 @@
                 <a:ea typeface="Ebrima"/>
                 <a:cs typeface="Ebrima"/>
               </a:rPr>
-              <a:t>ኢየሱስ ነው (3x)</a:t>
+              <a:t>ኢየሱስ ነው 3x</a:t>
             </a:r>
           </a:p>
         </p:txBody>
@@ -3995,7 +3995,7 @@
                 <a:ea typeface="Ebrima"/>
                 <a:cs typeface="Ebrima"/>
               </a:rPr>
-              <a:t>እውነት ሕይወት መንገድ (2x)</a:t>
+              <a:t>እውነት ሕይወት መንገድ 2x</a:t>
             </a:r>
           </a:p>
           <a:p>
@@ -4013,7 +4013,7 @@
                 <a:ea typeface="Ebrima"/>
                 <a:cs typeface="Ebrima"/>
               </a:rPr>
-              <a:t>ኢየሱስ ነው (3x)</a:t>
+              <a:t>ኢየሱስ ነው 3x</a:t>
             </a:r>
           </a:p>
           <a:p>
@@ -4031,7 +4031,7 @@
                 <a:ea typeface="Ebrima"/>
                 <a:cs typeface="Ebrima"/>
               </a:rPr>
-              <a:t>እውነት ሕይወት መንገድ (2x)</a:t>
+              <a:t>እውነት ሕይወት መንገድ 2x</a:t>
             </a:r>
           </a:p>
           <a:p>
@@ -4049,7 +4049,7 @@
                 <a:ea typeface="Ebrima"/>
                 <a:cs typeface="Ebrima"/>
               </a:rPr>
-              <a:t>ኢየሱስ ነው (3x)</a:t>
+              <a:t>ኢየሱስ ነው 3x</a:t>
             </a:r>
           </a:p>
         </p:txBody>
